--- a/slides/00.pptx
+++ b/slides/00.pptx
@@ -213,7 +213,7 @@
           <a:p>
             <a:fld id="{15D8E939-9ECB-9C46-A248-99A4B8126363}" type="datetimeFigureOut">
               <a:rPr lang="en-JP" smtClean="0"/>
-              <a:t>2025/12/04</a:t>
+              <a:t>5/11/26</a:t>
             </a:fld>
             <a:endParaRPr lang="en-JP"/>
           </a:p>
@@ -630,7 +630,7 @@
           <a:p>
             <a:fld id="{B305A450-B214-F843-90D3-43D45AB970BF}" type="datetime1">
               <a:rPr lang="en-US" smtClean="0"/>
-              <a:t>12/4/25</a:t>
+              <a:t>5/11/26</a:t>
             </a:fld>
             <a:endParaRPr lang="en-JP"/>
           </a:p>
@@ -830,7 +830,7 @@
           <a:p>
             <a:fld id="{3FE6076C-7478-7547-8EE6-BBCC8E0F5965}" type="datetime1">
               <a:rPr lang="en-US" smtClean="0"/>
-              <a:t>12/4/25</a:t>
+              <a:t>5/11/26</a:t>
             </a:fld>
             <a:endParaRPr lang="en-JP"/>
           </a:p>
@@ -1040,7 +1040,7 @@
           <a:p>
             <a:fld id="{9ACD9DBC-B76F-1F49-9ACB-B3C63B260788}" type="datetime1">
               <a:rPr lang="en-US" smtClean="0"/>
-              <a:t>12/4/25</a:t>
+              <a:t>5/11/26</a:t>
             </a:fld>
             <a:endParaRPr lang="en-JP"/>
           </a:p>
@@ -1240,7 +1240,7 @@
           <a:p>
             <a:fld id="{97256E53-50F3-8B41-827D-E71E7A78D7C8}" type="datetime1">
               <a:rPr lang="en-US" smtClean="0"/>
-              <a:t>12/4/25</a:t>
+              <a:t>5/11/26</a:t>
             </a:fld>
             <a:endParaRPr lang="en-JP"/>
           </a:p>
@@ -1516,7 +1516,7 @@
           <a:p>
             <a:fld id="{60AD3F61-4B41-B048-9345-533AA47C1AFA}" type="datetime1">
               <a:rPr lang="en-US" smtClean="0"/>
-              <a:t>12/4/25</a:t>
+              <a:t>5/11/26</a:t>
             </a:fld>
             <a:endParaRPr lang="en-JP"/>
           </a:p>
@@ -1784,7 +1784,7 @@
           <a:p>
             <a:fld id="{9E0C3DDA-75D5-FE45-B27F-09B23348A3CF}" type="datetime1">
               <a:rPr lang="en-US" smtClean="0"/>
-              <a:t>12/4/25</a:t>
+              <a:t>5/11/26</a:t>
             </a:fld>
             <a:endParaRPr lang="en-JP"/>
           </a:p>
@@ -2199,7 +2199,7 @@
           <a:p>
             <a:fld id="{91B16E66-205B-D348-AF09-8C13DA8BDFF9}" type="datetime1">
               <a:rPr lang="en-US" smtClean="0"/>
-              <a:t>12/4/25</a:t>
+              <a:t>5/11/26</a:t>
             </a:fld>
             <a:endParaRPr lang="en-JP"/>
           </a:p>
@@ -2341,7 +2341,7 @@
           <a:p>
             <a:fld id="{222CE9F2-560E-4648-82A4-0C4186C23AAC}" type="datetime1">
               <a:rPr lang="en-US" smtClean="0"/>
-              <a:t>12/4/25</a:t>
+              <a:t>5/11/26</a:t>
             </a:fld>
             <a:endParaRPr lang="en-JP"/>
           </a:p>
@@ -2454,7 +2454,7 @@
           <a:p>
             <a:fld id="{2914F908-ED62-3949-B616-21C7C363772F}" type="datetime1">
               <a:rPr lang="en-US" smtClean="0"/>
-              <a:t>12/4/25</a:t>
+              <a:t>5/11/26</a:t>
             </a:fld>
             <a:endParaRPr lang="en-JP"/>
           </a:p>
@@ -2767,7 +2767,7 @@
           <a:p>
             <a:fld id="{8280A505-8893-D540-9413-F8B9ED1E178A}" type="datetime1">
               <a:rPr lang="en-US" smtClean="0"/>
-              <a:t>12/4/25</a:t>
+              <a:t>5/11/26</a:t>
             </a:fld>
             <a:endParaRPr lang="en-JP"/>
           </a:p>
@@ -3056,7 +3056,7 @@
           <a:p>
             <a:fld id="{40CD7CE6-B77F-5744-9AB9-6E4139649818}" type="datetime1">
               <a:rPr lang="en-US" smtClean="0"/>
-              <a:t>12/4/25</a:t>
+              <a:t>5/11/26</a:t>
             </a:fld>
             <a:endParaRPr lang="en-JP"/>
           </a:p>
@@ -3299,7 +3299,7 @@
           <a:p>
             <a:fld id="{DC28B759-A9A1-7B41-B30F-900953345635}" type="datetime1">
               <a:rPr lang="en-US" smtClean="0"/>
-              <a:t>12/4/25</a:t>
+              <a:t>5/11/26</a:t>
             </a:fld>
             <a:endParaRPr lang="en-JP"/>
           </a:p>
@@ -4074,7 +4074,19 @@
             </a:r>
             <a:r>
               <a:rPr lang="ja-JP" altLang="en-US"/>
-              <a:t>のもと，アメリカは中国との貿易摩擦を激化させるなど，国際貿易について自由主義から保護主義寄りの政策へと移行。</a:t>
+              <a:t>のもと，アメリカは中国との貿易摩擦を激化させるなど，国際貿易について自由主義から</a:t>
+            </a:r>
+            <a:r>
+              <a:rPr lang="ja-JP" altLang="en-US">
+                <a:highlight>
+                  <a:srgbClr val="00FFFF"/>
+                </a:highlight>
+              </a:rPr>
+              <a:t>保護主義</a:t>
+            </a:r>
+            <a:r>
+              <a:rPr lang="ja-JP" altLang="en-US"/>
+              <a:t>寄りの政策へと移行。</a:t>
             </a:r>
             <a:endParaRPr lang="en-US" altLang="ja-JP" dirty="0"/>
           </a:p>
@@ -5100,15 +5112,27 @@
           </a:p>
           <a:p>
             <a:r>
-              <a:rPr lang="zh-CN" altLang="en-US" dirty="0"/>
+              <a:rPr lang="zh-CN" altLang="en-US" dirty="0">
+                <a:highlight>
+                  <a:srgbClr val="00FFFF"/>
+                </a:highlight>
+              </a:rPr>
               <a:t>保護主義</a:t>
             </a:r>
             <a:r>
-              <a:rPr lang="ja-JP" altLang="en-US"/>
+              <a:rPr lang="ja-JP" altLang="en-US">
+                <a:highlight>
+                  <a:srgbClr val="00FFFF"/>
+                </a:highlight>
+              </a:rPr>
               <a:t>の</a:t>
             </a:r>
             <a:r>
-              <a:rPr lang="zh-CN" altLang="en-US" dirty="0"/>
+              <a:rPr lang="zh-CN" altLang="en-US" dirty="0">
+                <a:highlight>
+                  <a:srgbClr val="00FFFF"/>
+                </a:highlight>
+              </a:rPr>
               <a:t>台頭</a:t>
             </a:r>
             <a:r>
@@ -5212,12 +5236,24 @@
               <a:t>する</a:t>
             </a:r>
             <a:r>
-              <a:rPr lang="zh-CN" altLang="en-US" dirty="0"/>
+              <a:rPr lang="zh-CN" altLang="en-US" dirty="0">
+                <a:highlight>
+                  <a:srgbClr val="00FFFF"/>
+                </a:highlight>
+              </a:rPr>
               <a:t>企業</a:t>
             </a:r>
             <a:r>
-              <a:rPr lang="ja-JP" altLang="en-US"/>
-              <a:t>のグローバル</a:t>
+              <a:rPr lang="ja-JP" altLang="en-US">
+                <a:highlight>
+                  <a:srgbClr val="00FFFF"/>
+                </a:highlight>
+              </a:rPr>
+              <a:t>の</a:t>
+            </a:r>
+            <a:r>
+              <a:rPr lang="ja-JP" altLang="en-US"/>
+              <a:t>グローバル</a:t>
             </a:r>
             <a:r>
               <a:rPr lang="zh-CN" altLang="en-US" dirty="0"/>
@@ -5317,7 +5353,11 @@
               <a:rPr lang="en-US" altLang="zh-CN" dirty="0"/>
             </a:br>
             <a:r>
-              <a:rPr lang="zh-CN" altLang="en-US" dirty="0"/>
+              <a:rPr lang="zh-CN" altLang="en-US" dirty="0">
+                <a:highlight>
+                  <a:srgbClr val="00FFFF"/>
+                </a:highlight>
+              </a:rPr>
               <a:t>比較優位</a:t>
             </a:r>
             <a:r>
@@ -5398,11 +5438,27 @@
             </a:r>
             <a:r>
               <a:rPr lang="ja-JP" altLang="en-US"/>
-              <a:t>のデヴィッド・リカードによる「</a:t>
-            </a:r>
-            <a:r>
-              <a:rPr lang="zh-CN" altLang="en-US" dirty="0"/>
-              <a:t>比較生産費説」（リカード・モデル）</a:t>
+              <a:t>のデヴィッド・リカードによる</a:t>
+            </a:r>
+            <a:r>
+              <a:rPr lang="ja-JP" altLang="en-US">
+                <a:highlight>
+                  <a:srgbClr val="00FFFF"/>
+                </a:highlight>
+              </a:rPr>
+              <a:t>「</a:t>
+            </a:r>
+            <a:r>
+              <a:rPr lang="zh-CN" altLang="en-US" dirty="0">
+                <a:highlight>
+                  <a:srgbClr val="00FFFF"/>
+                </a:highlight>
+              </a:rPr>
+              <a:t>比較生産費説」</a:t>
+            </a:r>
+            <a:r>
+              <a:rPr lang="zh-CN" altLang="en-US" dirty="0"/>
+              <a:t>（リカード・モデル）</a:t>
             </a:r>
             <a:endParaRPr lang="en-US" altLang="zh-CN" dirty="0"/>
           </a:p>
@@ -5693,13 +5749,29 @@
             </a:r>
             <a:r>
               <a:rPr lang="ja-JP" altLang="en-US"/>
-              <a:t>に構築されたポール・クルーグマンらによる</a:t>
-            </a:r>
-            <a:r>
-              <a:rPr lang="zh-CN" altLang="en-US" dirty="0"/>
+              <a:t>に構築された</a:t>
+            </a:r>
+            <a:r>
+              <a:rPr lang="ja-JP" altLang="en-US">
+                <a:highlight>
+                  <a:srgbClr val="00FFFF"/>
+                </a:highlight>
+              </a:rPr>
+              <a:t>ポール・クルーグマンらによる</a:t>
+            </a:r>
+            <a:r>
+              <a:rPr lang="zh-CN" altLang="en-US" dirty="0">
+                <a:highlight>
+                  <a:srgbClr val="00FFFF"/>
+                </a:highlight>
+              </a:rPr>
               <a:t>新貿易理論</a:t>
             </a:r>
-            <a:endParaRPr lang="en-US" altLang="zh-CN" dirty="0"/>
+            <a:endParaRPr lang="en-US" altLang="zh-CN" dirty="0">
+              <a:highlight>
+                <a:srgbClr val="00FFFF"/>
+              </a:highlight>
+            </a:endParaRPr>
           </a:p>
           <a:p>
             <a:r>
@@ -5752,13 +5824,29 @@
             </a:r>
             <a:r>
               <a:rPr lang="ja-JP" altLang="en-US"/>
-              <a:t>、マーク・メリッツらによる</a:t>
-            </a:r>
-            <a:r>
-              <a:rPr lang="zh-CN" altLang="en-US" dirty="0"/>
+              <a:t>、</a:t>
+            </a:r>
+            <a:r>
+              <a:rPr lang="ja-JP" altLang="en-US">
+                <a:highlight>
+                  <a:srgbClr val="00FFFF"/>
+                </a:highlight>
+              </a:rPr>
+              <a:t>マーク・メリッツらによる</a:t>
+            </a:r>
+            <a:r>
+              <a:rPr lang="zh-CN" altLang="en-US" dirty="0">
+                <a:highlight>
+                  <a:srgbClr val="00FFFF"/>
+                </a:highlight>
+              </a:rPr>
               <a:t>新・新貿易理論</a:t>
             </a:r>
-            <a:endParaRPr lang="en-US" altLang="ja-JP" dirty="0"/>
+            <a:endParaRPr lang="en-US" altLang="ja-JP" dirty="0">
+              <a:highlight>
+                <a:srgbClr val="00FFFF"/>
+              </a:highlight>
+            </a:endParaRPr>
           </a:p>
           <a:p>
             <a:r>
@@ -6213,18 +6301,38 @@
             </a:r>
             <a:r>
               <a:rPr lang="ja-JP" altLang="en-US"/>
-              <a:t>するグロ ーバル</a:t>
-            </a:r>
-            <a:r>
-              <a:rPr lang="zh-CN" altLang="en-US" dirty="0"/>
+              <a:t>する</a:t>
+            </a:r>
+            <a:r>
+              <a:rPr lang="ja-JP" altLang="en-US">
+                <a:highlight>
+                  <a:srgbClr val="00FFFF"/>
+                </a:highlight>
+              </a:rPr>
+              <a:t>グロ ーバル</a:t>
+            </a:r>
+            <a:r>
+              <a:rPr lang="zh-CN" altLang="en-US" dirty="0">
+                <a:highlight>
+                  <a:srgbClr val="00FFFF"/>
+                </a:highlight>
+              </a:rPr>
               <a:t>化</a:t>
             </a:r>
             <a:r>
-              <a:rPr lang="ja-JP" altLang="en-US"/>
+              <a:rPr lang="ja-JP" altLang="en-US">
+                <a:highlight>
+                  <a:srgbClr val="00FFFF"/>
+                </a:highlight>
+              </a:rPr>
               <a:t>と</a:t>
             </a:r>
             <a:r>
-              <a:rPr lang="zh-CN" altLang="en-US" dirty="0"/>
+              <a:rPr lang="zh-CN" altLang="en-US" dirty="0">
+                <a:highlight>
+                  <a:srgbClr val="00FFFF"/>
+                </a:highlight>
+              </a:rPr>
               <a:t>格差</a:t>
             </a:r>
             <a:r>
@@ -6669,8 +6777,16 @@
           <a:lstStyle/>
           <a:p>
             <a:r>
+              <a:rPr lang="en-JP" dirty="0">
+                <a:highlight>
+                  <a:srgbClr val="FFFF00"/>
+                </a:highlight>
+              </a:rPr>
+              <a:t>多様な財</a:t>
+            </a:r>
+            <a:r>
               <a:rPr lang="en-JP" dirty="0"/>
-              <a:t>多様な財の消費を可能にするグローバル化</a:t>
+              <a:t>の消費を可能にするグローバル化</a:t>
             </a:r>
           </a:p>
         </p:txBody>
@@ -6827,7 +6943,19 @@
             <a:pPr lvl="1"/>
             <a:r>
               <a:rPr lang="ja-JP" altLang="en-US"/>
-              <a:t>ハンバーガー・ ショップのシェイクシャック（アメリカ）での外食</a:t>
+              <a:t>ハンバーガー・ ショップの</a:t>
+            </a:r>
+            <a:r>
+              <a:rPr lang="ja-JP" altLang="en-US">
+                <a:highlight>
+                  <a:srgbClr val="FFFF00"/>
+                </a:highlight>
+              </a:rPr>
+              <a:t>シェイクシャック</a:t>
+            </a:r>
+            <a:r>
+              <a:rPr lang="ja-JP" altLang="en-US"/>
+              <a:t>（アメリカ）での外食</a:t>
             </a:r>
             <a:endParaRPr lang="en-US" altLang="ja-JP" dirty="0"/>
           </a:p>
@@ -7617,40 +7745,56 @@
           <a:p>
             <a:pPr lvl="1"/>
             <a:r>
-              <a:rPr lang="ja-JP" altLang="en-US"/>
+              <a:rPr lang="ja-JP" altLang="en-US">
+                <a:highlight>
+                  <a:srgbClr val="00FFFF"/>
+                </a:highlight>
+              </a:rPr>
               <a:t>モノ・・・国際貿易</a:t>
             </a:r>
+            <a:endParaRPr lang="en-US" altLang="ja-JP" dirty="0">
+              <a:highlight>
+                <a:srgbClr val="00FFFF"/>
+              </a:highlight>
+            </a:endParaRPr>
+          </a:p>
+          <a:p>
+            <a:pPr lvl="1"/>
+            <a:r>
+              <a:rPr lang="ja-JP" altLang="en-US"/>
+              <a:t>サービス・・・国際貿易</a:t>
+            </a:r>
             <a:endParaRPr lang="en-US" altLang="ja-JP" dirty="0"/>
           </a:p>
           <a:p>
             <a:pPr lvl="1"/>
             <a:r>
-              <a:rPr lang="ja-JP" altLang="en-US"/>
-              <a:t>サービス・・・国際貿易</a:t>
-            </a:r>
-            <a:endParaRPr lang="en-US" altLang="ja-JP" dirty="0"/>
+              <a:rPr lang="zh-CN" altLang="en-US" dirty="0"/>
+              <a:t>資金・・・国際投資</a:t>
+            </a:r>
+            <a:endParaRPr lang="en-US" altLang="zh-CN" dirty="0"/>
           </a:p>
           <a:p>
             <a:pPr lvl="1"/>
             <a:r>
               <a:rPr lang="zh-CN" altLang="en-US" dirty="0"/>
-              <a:t>資金・・・国際投資</a:t>
+              <a:t>人・・・移民・国際観光・留学</a:t>
             </a:r>
             <a:endParaRPr lang="en-US" altLang="zh-CN" dirty="0"/>
           </a:p>
           <a:p>
             <a:pPr lvl="1"/>
             <a:r>
-              <a:rPr lang="zh-CN" altLang="en-US" dirty="0"/>
-              <a:t>人・・・移民・国際観光・留学</a:t>
-            </a:r>
-            <a:endParaRPr lang="en-US" altLang="zh-CN" dirty="0"/>
-          </a:p>
-          <a:p>
-            <a:pPr lvl="1"/>
-            <a:r>
-              <a:rPr lang="zh-CN" altLang="en-US" dirty="0"/>
-              <a:t>企業・・国際投資</a:t>
+              <a:rPr lang="zh-CN" altLang="en-US" dirty="0">
+                <a:highlight>
+                  <a:srgbClr val="00FFFF"/>
+                </a:highlight>
+              </a:rPr>
+              <a:t>企業</a:t>
+            </a:r>
+            <a:r>
+              <a:rPr lang="zh-CN" altLang="en-US" dirty="0"/>
+              <a:t>・・国際投資</a:t>
             </a:r>
             <a:r>
               <a:rPr lang="en-US" altLang="zh-CN" dirty="0"/>
@@ -8306,68 +8450,68 @@
           <a:custGeom>
             <a:avLst/>
             <a:gdLst>
-              <a:gd name="csX0" fmla="*/ 0 w 3255095"/>
-              <a:gd name="csY0" fmla="*/ 0 h 18288"/>
-              <a:gd name="csX1" fmla="*/ 618468 w 3255095"/>
-              <a:gd name="csY1" fmla="*/ 0 h 18288"/>
-              <a:gd name="csX2" fmla="*/ 1269487 w 3255095"/>
-              <a:gd name="csY2" fmla="*/ 0 h 18288"/>
-              <a:gd name="csX3" fmla="*/ 1953057 w 3255095"/>
-              <a:gd name="csY3" fmla="*/ 0 h 18288"/>
-              <a:gd name="csX4" fmla="*/ 2636627 w 3255095"/>
-              <a:gd name="csY4" fmla="*/ 0 h 18288"/>
-              <a:gd name="csX5" fmla="*/ 3255095 w 3255095"/>
-              <a:gd name="csY5" fmla="*/ 0 h 18288"/>
-              <a:gd name="csX6" fmla="*/ 3255095 w 3255095"/>
-              <a:gd name="csY6" fmla="*/ 18288 h 18288"/>
-              <a:gd name="csX7" fmla="*/ 2538974 w 3255095"/>
-              <a:gd name="csY7" fmla="*/ 18288 h 18288"/>
-              <a:gd name="csX8" fmla="*/ 1822853 w 3255095"/>
-              <a:gd name="csY8" fmla="*/ 18288 h 18288"/>
-              <a:gd name="csX9" fmla="*/ 1171834 w 3255095"/>
-              <a:gd name="csY9" fmla="*/ 18288 h 18288"/>
-              <a:gd name="csX10" fmla="*/ 0 w 3255095"/>
-              <a:gd name="csY10" fmla="*/ 18288 h 18288"/>
-              <a:gd name="csX11" fmla="*/ 0 w 3255095"/>
-              <a:gd name="csY11" fmla="*/ 0 h 18288"/>
+              <a:gd name="connsiteX0" fmla="*/ 0 w 3255095"/>
+              <a:gd name="connsiteY0" fmla="*/ 0 h 18288"/>
+              <a:gd name="connsiteX1" fmla="*/ 618468 w 3255095"/>
+              <a:gd name="connsiteY1" fmla="*/ 0 h 18288"/>
+              <a:gd name="connsiteX2" fmla="*/ 1269487 w 3255095"/>
+              <a:gd name="connsiteY2" fmla="*/ 0 h 18288"/>
+              <a:gd name="connsiteX3" fmla="*/ 1953057 w 3255095"/>
+              <a:gd name="connsiteY3" fmla="*/ 0 h 18288"/>
+              <a:gd name="connsiteX4" fmla="*/ 2636627 w 3255095"/>
+              <a:gd name="connsiteY4" fmla="*/ 0 h 18288"/>
+              <a:gd name="connsiteX5" fmla="*/ 3255095 w 3255095"/>
+              <a:gd name="connsiteY5" fmla="*/ 0 h 18288"/>
+              <a:gd name="connsiteX6" fmla="*/ 3255095 w 3255095"/>
+              <a:gd name="connsiteY6" fmla="*/ 18288 h 18288"/>
+              <a:gd name="connsiteX7" fmla="*/ 2538974 w 3255095"/>
+              <a:gd name="connsiteY7" fmla="*/ 18288 h 18288"/>
+              <a:gd name="connsiteX8" fmla="*/ 1822853 w 3255095"/>
+              <a:gd name="connsiteY8" fmla="*/ 18288 h 18288"/>
+              <a:gd name="connsiteX9" fmla="*/ 1171834 w 3255095"/>
+              <a:gd name="connsiteY9" fmla="*/ 18288 h 18288"/>
+              <a:gd name="connsiteX10" fmla="*/ 0 w 3255095"/>
+              <a:gd name="connsiteY10" fmla="*/ 18288 h 18288"/>
+              <a:gd name="connsiteX11" fmla="*/ 0 w 3255095"/>
+              <a:gd name="connsiteY11" fmla="*/ 0 h 18288"/>
             </a:gdLst>
             <a:ahLst/>
             <a:cxnLst>
               <a:cxn ang="0">
-                <a:pos x="csX0" y="csY0"/>
+                <a:pos x="connsiteX0" y="connsiteY0"/>
               </a:cxn>
               <a:cxn ang="0">
-                <a:pos x="csX1" y="csY1"/>
+                <a:pos x="connsiteX1" y="connsiteY1"/>
               </a:cxn>
               <a:cxn ang="0">
-                <a:pos x="csX2" y="csY2"/>
+                <a:pos x="connsiteX2" y="connsiteY2"/>
               </a:cxn>
               <a:cxn ang="0">
-                <a:pos x="csX3" y="csY3"/>
+                <a:pos x="connsiteX3" y="connsiteY3"/>
               </a:cxn>
               <a:cxn ang="0">
-                <a:pos x="csX4" y="csY4"/>
+                <a:pos x="connsiteX4" y="connsiteY4"/>
               </a:cxn>
               <a:cxn ang="0">
-                <a:pos x="csX5" y="csY5"/>
+                <a:pos x="connsiteX5" y="connsiteY5"/>
               </a:cxn>
               <a:cxn ang="0">
-                <a:pos x="csX6" y="csY6"/>
+                <a:pos x="connsiteX6" y="connsiteY6"/>
               </a:cxn>
               <a:cxn ang="0">
-                <a:pos x="csX7" y="csY7"/>
+                <a:pos x="connsiteX7" y="connsiteY7"/>
               </a:cxn>
               <a:cxn ang="0">
-                <a:pos x="csX8" y="csY8"/>
+                <a:pos x="connsiteX8" y="connsiteY8"/>
               </a:cxn>
               <a:cxn ang="0">
-                <a:pos x="csX9" y="csY9"/>
+                <a:pos x="connsiteX9" y="connsiteY9"/>
               </a:cxn>
               <a:cxn ang="0">
-                <a:pos x="csX10" y="csY10"/>
+                <a:pos x="connsiteX10" y="connsiteY10"/>
               </a:cxn>
               <a:cxn ang="0">
-                <a:pos x="csX11" y="csY11"/>
+                <a:pos x="connsiteX11" y="connsiteY11"/>
               </a:cxn>
             </a:cxnLst>
             <a:rect l="l" t="t" r="r" b="b"/>
